--- a/3_Presentation/MAGIC_Sunum.pptx
+++ b/3_Presentation/MAGIC_Sunum.pptx
@@ -5,7 +5,7 @@
     <p:sldMasterId id="2147483648" r:id="rId1"/>
   </p:sldMasterIdLst>
   <p:notesMasterIdLst>
-    <p:notesMasterId r:id="rId32"/>
+    <p:notesMasterId r:id="rId31"/>
   </p:notesMasterIdLst>
   <p:sldIdLst>
     <p:sldId id="256" r:id="rId2"/>
@@ -36,8 +36,7 @@
     <p:sldId id="289" r:id="rId27"/>
     <p:sldId id="296" r:id="rId28"/>
     <p:sldId id="283" r:id="rId29"/>
-    <p:sldId id="284" r:id="rId30"/>
-    <p:sldId id="285" r:id="rId31"/>
+    <p:sldId id="285" r:id="rId30"/>
   </p:sldIdLst>
   <p:sldSz cx="9144000" cy="5143500" type="screen16x9"/>
   <p:notesSz cx="5143500" cy="9144000"/>
@@ -2180,90 +2179,6 @@
             <a:fld id="{F7021451-1387-4CA6-816F-3879F97B5CBC}" type="slidenum">
               <a:rPr lang="en-US"/>
               <a:t>3</a:t>
-            </a:fld>
-            <a:endParaRPr lang="en-US"/>
-          </a:p>
-        </p:txBody>
-      </p:sp>
-    </p:spTree>
-    <p:extLst>
-      <p:ext uri="{BB962C8B-B14F-4D97-AF65-F5344CB8AC3E}">
-        <p14:creationId xmlns:p14="http://schemas.microsoft.com/office/powerpoint/2010/main" val="1024086991"/>
-      </p:ext>
-    </p:extLst>
-  </p:cSld>
-  <p:clrMapOvr>
-    <a:masterClrMapping/>
-  </p:clrMapOvr>
-</p:notes>
-</file>
-
-<file path=ppt/notesSlides/notesSlide30.xml><?xml version="1.0" encoding="utf-8"?>
-<p:notes xmlns:a="http://schemas.openxmlformats.org/drawingml/2006/main" xmlns:r="http://schemas.openxmlformats.org/officeDocument/2006/relationships" xmlns:p="http://schemas.openxmlformats.org/presentationml/2006/main">
-  <p:cSld>
-    <p:spTree>
-      <p:nvGrpSpPr>
-        <p:cNvPr id="1" name=""/>
-        <p:cNvGrpSpPr/>
-        <p:nvPr/>
-      </p:nvGrpSpPr>
-      <p:grpSpPr>
-        <a:xfrm>
-          <a:off x="0" y="0"/>
-          <a:ext cx="0" cy="0"/>
-          <a:chOff x="0" y="0"/>
-          <a:chExt cx="0" cy="0"/>
-        </a:xfrm>
-      </p:grpSpPr>
-      <p:sp>
-        <p:nvSpPr>
-          <p:cNvPr id="2" name="Slide Image Placeholder 1"/>
-          <p:cNvSpPr>
-            <a:spLocks noGrp="1" noRot="1" noChangeAspect="1"/>
-          </p:cNvSpPr>
-          <p:nvPr>
-            <p:ph type="sldImg"/>
-          </p:nvPr>
-        </p:nvSpPr>
-        <p:spPr/>
-      </p:sp>
-      <p:sp>
-        <p:nvSpPr>
-          <p:cNvPr id="3" name="Notes Placeholder 2"/>
-          <p:cNvSpPr>
-            <a:spLocks noGrp="1"/>
-          </p:cNvSpPr>
-          <p:nvPr>
-            <p:ph type="body" idx="1"/>
-          </p:nvPr>
-        </p:nvSpPr>
-        <p:spPr/>
-        <p:txBody>
-          <a:bodyPr/>
-          <a:lstStyle/>
-          <a:p>
-            <a:endParaRPr lang="en-US" dirty="0"/>
-          </a:p>
-        </p:txBody>
-      </p:sp>
-      <p:sp>
-        <p:nvSpPr>
-          <p:cNvPr id="4" name="Slide Number Placeholder 3"/>
-          <p:cNvSpPr>
-            <a:spLocks noGrp="1"/>
-          </p:cNvSpPr>
-          <p:nvPr>
-            <p:ph type="sldNum" sz="quarter" idx="10"/>
-          </p:nvPr>
-        </p:nvSpPr>
-        <p:spPr/>
-        <p:txBody>
-          <a:bodyPr/>
-          <a:lstStyle/>
-          <a:p>
-            <a:fld id="{F7021451-1387-4CA6-816F-3879F97B5CBC}" type="slidenum">
-              <a:rPr lang="en-US"/>
-              <a:t>30</a:t>
             </a:fld>
             <a:endParaRPr lang="en-US"/>
           </a:p>
@@ -28438,56 +28353,6 @@
           </a:p>
         </p:txBody>
       </p:sp>
-      <p:sp>
-        <p:nvSpPr>
-          <p:cNvPr id="56" name="Text 54"/>
-          <p:cNvSpPr/>
-          <p:nvPr/>
-        </p:nvSpPr>
-        <p:spPr>
-          <a:xfrm>
-            <a:off x="8412480" y="4919472"/>
-            <a:ext cx="640080" cy="201168"/>
-          </a:xfrm>
-          <a:prstGeom prst="rect">
-            <a:avLst/>
-          </a:prstGeom>
-          <a:noFill/>
-          <a:ln/>
-        </p:spPr>
-        <p:txBody>
-          <a:bodyPr wrap="square" rtlCol="0" anchor="ctr"/>
-          <a:lstStyle/>
-          <a:p>
-            <a:pPr marL="0" indent="0" algn="r">
-              <a:buNone/>
-            </a:pPr>
-            <a:r>
-              <a:rPr lang="en-US" sz="800" dirty="0">
-                <a:solidFill>
-                  <a:srgbClr val="6B9EC0"/>
-                </a:solidFill>
-                <a:latin typeface="Calibri" pitchFamily="34" charset="0"/>
-                <a:ea typeface="Calibri" pitchFamily="34" charset="-122"/>
-                <a:cs typeface="Calibri" pitchFamily="34" charset="-120"/>
-              </a:rPr>
-              <a:t>23 / 3</a:t>
-            </a:r>
-            <a:r>
-              <a:rPr lang="tr-TR" sz="800" dirty="0">
-                <a:solidFill>
-                  <a:srgbClr val="6B9EC0"/>
-                </a:solidFill>
-                <a:latin typeface="Calibri" pitchFamily="34" charset="0"/>
-                <a:ea typeface="Calibri" pitchFamily="34" charset="-122"/>
-                <a:cs typeface="Calibri" pitchFamily="34" charset="-120"/>
-              </a:rPr>
-              <a:t>7</a:t>
-            </a:r>
-            <a:endParaRPr lang="en-US" sz="800" dirty="0"/>
-          </a:p>
-        </p:txBody>
-      </p:sp>
     </p:spTree>
   </p:cSld>
   <p:clrMapOvr>
@@ -33442,56 +33307,6 @@
           </a:p>
         </p:txBody>
       </p:sp>
-      <p:sp>
-        <p:nvSpPr>
-          <p:cNvPr id="32" name="Text 28"/>
-          <p:cNvSpPr/>
-          <p:nvPr/>
-        </p:nvSpPr>
-        <p:spPr>
-          <a:xfrm>
-            <a:off x="8412480" y="4919472"/>
-            <a:ext cx="640080" cy="201168"/>
-          </a:xfrm>
-          <a:prstGeom prst="rect">
-            <a:avLst/>
-          </a:prstGeom>
-          <a:noFill/>
-          <a:ln/>
-        </p:spPr>
-        <p:txBody>
-          <a:bodyPr wrap="square" rtlCol="0" anchor="ctr"/>
-          <a:lstStyle/>
-          <a:p>
-            <a:pPr marL="0" indent="0" algn="r">
-              <a:buNone/>
-            </a:pPr>
-            <a:r>
-              <a:rPr lang="en-US" sz="800" dirty="0">
-                <a:solidFill>
-                  <a:srgbClr val="6B9EC0"/>
-                </a:solidFill>
-                <a:latin typeface="Calibri" pitchFamily="34" charset="0"/>
-                <a:ea typeface="Calibri" pitchFamily="34" charset="-122"/>
-                <a:cs typeface="Calibri" pitchFamily="34" charset="-120"/>
-              </a:rPr>
-              <a:t>29 / 3</a:t>
-            </a:r>
-            <a:r>
-              <a:rPr lang="tr-TR" sz="800" dirty="0">
-                <a:solidFill>
-                  <a:srgbClr val="6B9EC0"/>
-                </a:solidFill>
-                <a:latin typeface="Calibri" pitchFamily="34" charset="0"/>
-                <a:ea typeface="Calibri" pitchFamily="34" charset="-122"/>
-                <a:cs typeface="Calibri" pitchFamily="34" charset="-120"/>
-              </a:rPr>
-              <a:t>7</a:t>
-            </a:r>
-            <a:endParaRPr lang="en-US" sz="800" dirty="0"/>
-          </a:p>
-        </p:txBody>
-      </p:sp>
       <p:pic>
         <p:nvPicPr>
           <p:cNvPr id="33" name="Resim 32">
@@ -34794,56 +34609,6 @@
                 <a:schemeClr val="bg1"/>
               </a:solidFill>
             </a:endParaRPr>
-          </a:p>
-        </p:txBody>
-      </p:sp>
-      <p:sp>
-        <p:nvSpPr>
-          <p:cNvPr id="11" name="Text 6"/>
-          <p:cNvSpPr/>
-          <p:nvPr/>
-        </p:nvSpPr>
-        <p:spPr>
-          <a:xfrm>
-            <a:off x="8412480" y="4919472"/>
-            <a:ext cx="640080" cy="201168"/>
-          </a:xfrm>
-          <a:prstGeom prst="rect">
-            <a:avLst/>
-          </a:prstGeom>
-          <a:noFill/>
-          <a:ln/>
-        </p:spPr>
-        <p:txBody>
-          <a:bodyPr wrap="square" rtlCol="0" anchor="ctr"/>
-          <a:lstStyle/>
-          <a:p>
-            <a:pPr marL="0" indent="0" algn="r">
-              <a:buNone/>
-            </a:pPr>
-            <a:r>
-              <a:rPr lang="en-US" sz="800" dirty="0">
-                <a:solidFill>
-                  <a:srgbClr val="6B9EC0"/>
-                </a:solidFill>
-                <a:latin typeface="Calibri" pitchFamily="34" charset="0"/>
-                <a:ea typeface="Calibri" pitchFamily="34" charset="-122"/>
-                <a:cs typeface="Calibri" pitchFamily="34" charset="-120"/>
-              </a:rPr>
-              <a:t>33 / 3</a:t>
-            </a:r>
-            <a:r>
-              <a:rPr lang="tr-TR" sz="800" dirty="0">
-                <a:solidFill>
-                  <a:srgbClr val="6B9EC0"/>
-                </a:solidFill>
-                <a:latin typeface="Calibri" pitchFamily="34" charset="0"/>
-                <a:ea typeface="Calibri" pitchFamily="34" charset="-122"/>
-                <a:cs typeface="Calibri" pitchFamily="34" charset="-120"/>
-              </a:rPr>
-              <a:t>7</a:t>
-            </a:r>
-            <a:endParaRPr lang="en-US" sz="800" dirty="0"/>
           </a:p>
         </p:txBody>
       </p:sp>
@@ -35986,15 +35751,7 @@
 
 <file path=ppt/slides/slide29.xml><?xml version="1.0" encoding="utf-8"?>
 <p:sld xmlns:a="http://schemas.openxmlformats.org/drawingml/2006/main" xmlns:r="http://schemas.openxmlformats.org/officeDocument/2006/relationships" xmlns:p="http://schemas.openxmlformats.org/presentationml/2006/main">
-  <p:cSld name="Slide 29">
-    <p:bg>
-      <p:bgPr>
-        <a:solidFill>
-          <a:srgbClr val="0B1120"/>
-        </a:solidFill>
-        <a:effectLst/>
-      </p:bgPr>
-    </p:bg>
+  <p:cSld>
     <p:spTree>
       <p:nvGrpSpPr>
         <p:cNvPr id="1" name=""/>
@@ -36018,7 +35775,7 @@
         <p:spPr>
           <a:xfrm>
             <a:off x="0" y="0"/>
-            <a:ext cx="9144000" cy="960120"/>
+            <a:ext cx="9144000" cy="5232400"/>
           </a:xfrm>
           <a:prstGeom prst="rect">
             <a:avLst/>
@@ -36037,7 +35794,7 @@
           <a:bodyPr/>
           <a:lstStyle/>
           <a:p>
-            <a:endParaRPr lang="tr-TR"/>
+            <a:endParaRPr lang="tr-TR" dirty="0"/>
           </a:p>
         </p:txBody>
       </p:sp>
@@ -36074,48 +35831,20 @@
                 <a:ea typeface="Calibri" pitchFamily="34" charset="-122"/>
                 <a:cs typeface="Calibri" pitchFamily="34" charset="-120"/>
               </a:rPr>
-              <a:t>4. SONUÇ — Gelecek Çalışmalar İçin Öneriler</a:t>
-            </a:r>
-            <a:endParaRPr lang="en-US" sz="2200" dirty="0"/>
-          </a:p>
-        </p:txBody>
-      </p:sp>
-      <p:sp>
-        <p:nvSpPr>
-          <p:cNvPr id="4" name="Text 2"/>
-          <p:cNvSpPr/>
-          <p:nvPr/>
-        </p:nvSpPr>
-        <p:spPr>
-          <a:xfrm>
-            <a:off x="365760" y="566928"/>
-            <a:ext cx="8412480" cy="320040"/>
-          </a:xfrm>
-          <a:prstGeom prst="rect">
-            <a:avLst/>
-          </a:prstGeom>
-          <a:noFill/>
-          <a:ln/>
-        </p:spPr>
-        <p:txBody>
-          <a:bodyPr wrap="square" lIns="0" tIns="0" rIns="0" bIns="0" rtlCol="0" anchor="ctr"/>
-          <a:lstStyle/>
-          <a:p>
-            <a:pPr marL="0" indent="0">
-              <a:buNone/>
-            </a:pPr>
-            <a:r>
-              <a:rPr lang="en-US" sz="1100" dirty="0">
-                <a:solidFill>
-                  <a:srgbClr val="00B4D8"/>
+              <a:t>Ka</a:t>
+            </a:r>
+            <a:r>
+              <a:rPr lang="tr-TR" sz="2200" b="1" dirty="0" err="1">
+                <a:solidFill>
+                  <a:srgbClr val="FFFFFF"/>
                 </a:solidFill>
                 <a:latin typeface="Calibri" pitchFamily="34" charset="0"/>
                 <a:ea typeface="Calibri" pitchFamily="34" charset="-122"/>
                 <a:cs typeface="Calibri" pitchFamily="34" charset="-120"/>
               </a:rPr>
-              <a:t>Literatürü daha da ileriye taşıyabilecek araştırma potansiyelleri</a:t>
-            </a:r>
-            <a:endParaRPr lang="en-US" sz="1100" dirty="0"/>
+              <a:t>panış</a:t>
+            </a:r>
+            <a:endParaRPr lang="en-US" sz="2200" dirty="0"/>
           </a:p>
         </p:txBody>
       </p:sp>
@@ -36153,746 +35882,229 @@
       </p:sp>
       <p:sp>
         <p:nvSpPr>
-          <p:cNvPr id="6" name="Shape 4"/>
-          <p:cNvSpPr/>
-          <p:nvPr/>
-        </p:nvSpPr>
-        <p:spPr>
-          <a:xfrm>
-            <a:off x="228600" y="1078992"/>
-            <a:ext cx="8686800" cy="713232"/>
-          </a:xfrm>
-          <a:prstGeom prst="rect">
-            <a:avLst/>
-          </a:prstGeom>
-          <a:solidFill>
-            <a:srgbClr val="111E35"/>
-          </a:solidFill>
-          <a:ln w="12700">
-            <a:solidFill>
-              <a:srgbClr val="111E35"/>
-            </a:solidFill>
-            <a:prstDash val="solid"/>
-          </a:ln>
-          <a:effectLst>
-            <a:outerShdw blurRad="101600" dist="38100" dir="8100000" algn="bl" rotWithShape="0">
-              <a:srgbClr val="000000">
-                <a:alpha val="25000"/>
-              </a:srgbClr>
-            </a:outerShdw>
-          </a:effectLst>
-        </p:spPr>
-        <p:txBody>
-          <a:bodyPr/>
-          <a:lstStyle/>
-          <a:p>
-            <a:endParaRPr lang="tr-TR"/>
-          </a:p>
-        </p:txBody>
-      </p:sp>
-      <p:sp>
-        <p:nvSpPr>
-          <p:cNvPr id="7" name="Shape 5"/>
-          <p:cNvSpPr/>
-          <p:nvPr/>
-        </p:nvSpPr>
-        <p:spPr>
-          <a:xfrm>
-            <a:off x="228600" y="1078992"/>
-            <a:ext cx="45720" cy="713232"/>
-          </a:xfrm>
-          <a:prstGeom prst="rect">
-            <a:avLst/>
-          </a:prstGeom>
-          <a:solidFill>
-            <a:srgbClr val="06D6A0"/>
-          </a:solidFill>
-          <a:ln w="12700">
-            <a:solidFill>
-              <a:srgbClr val="06D6A0"/>
-            </a:solidFill>
-            <a:prstDash val="solid"/>
-          </a:ln>
-        </p:spPr>
-        <p:txBody>
-          <a:bodyPr/>
-          <a:lstStyle/>
-          <a:p>
-            <a:endParaRPr lang="tr-TR"/>
-          </a:p>
-        </p:txBody>
-      </p:sp>
-      <p:sp>
-        <p:nvSpPr>
-          <p:cNvPr id="8" name="Text 6"/>
-          <p:cNvSpPr/>
-          <p:nvPr/>
-        </p:nvSpPr>
-        <p:spPr>
-          <a:xfrm>
-            <a:off x="338328" y="1143000"/>
-            <a:ext cx="8522208" cy="274320"/>
+          <p:cNvPr id="6" name="Metin kutusu 5">
+            <a:extLst>
+              <a:ext uri="{FF2B5EF4-FFF2-40B4-BE49-F238E27FC236}">
+                <a16:creationId xmlns:a16="http://schemas.microsoft.com/office/drawing/2014/main" id="{CC74C18C-A522-2375-1D89-86048042E2D7}"/>
+              </a:ext>
+            </a:extLst>
+          </p:cNvPr>
+          <p:cNvSpPr txBox="1"/>
+          <p:nvPr/>
+        </p:nvSpPr>
+        <p:spPr>
+          <a:xfrm>
+            <a:off x="228600" y="1150570"/>
+            <a:ext cx="8055501" cy="2862322"/>
           </a:xfrm>
           <a:prstGeom prst="rect">
             <a:avLst/>
           </a:prstGeom>
           <a:noFill/>
-          <a:ln/>
-        </p:spPr>
-        <p:txBody>
-          <a:bodyPr wrap="square" lIns="0" tIns="0" rIns="0" bIns="0" rtlCol="0" anchor="ctr"/>
-          <a:lstStyle/>
-          <a:p>
-            <a:pPr marL="0" indent="0">
-              <a:buNone/>
-            </a:pPr>
-            <a:r>
-              <a:rPr lang="en-US" sz="1100" b="1" dirty="0">
-                <a:solidFill>
-                  <a:srgbClr val="06D6A0"/>
-                </a:solidFill>
-                <a:latin typeface="Calibri" pitchFamily="34" charset="0"/>
-                <a:ea typeface="Calibri" pitchFamily="34" charset="-122"/>
-                <a:cs typeface="Calibri" pitchFamily="34" charset="-120"/>
-              </a:rPr>
-              <a:t>Öneri 1: Alternatif Sentetik Örnekleme</a:t>
-            </a:r>
-            <a:endParaRPr lang="en-US" sz="1100" dirty="0"/>
-          </a:p>
-        </p:txBody>
-      </p:sp>
-      <p:sp>
-        <p:nvSpPr>
-          <p:cNvPr id="9" name="Text 7"/>
-          <p:cNvSpPr/>
-          <p:nvPr/>
-        </p:nvSpPr>
-        <p:spPr>
-          <a:xfrm>
-            <a:off x="338328" y="1426464"/>
-            <a:ext cx="8522208" cy="274320"/>
-          </a:xfrm>
-          <a:prstGeom prst="rect">
-            <a:avLst/>
-          </a:prstGeom>
-          <a:noFill/>
-          <a:ln/>
-        </p:spPr>
-        <p:txBody>
-          <a:bodyPr wrap="square" lIns="0" tIns="0" rIns="0" bIns="0" rtlCol="0" anchor="ctr"/>
-          <a:lstStyle/>
-          <a:p>
-            <a:pPr marL="0" indent="0">
-              <a:buNone/>
-            </a:pPr>
-            <a:r>
-              <a:rPr lang="en-US" sz="1050" dirty="0">
-                <a:solidFill>
-                  <a:srgbClr val="CBD5E1"/>
-                </a:solidFill>
-                <a:latin typeface="Calibri" pitchFamily="34" charset="0"/>
-                <a:ea typeface="Calibri" pitchFamily="34" charset="-122"/>
-                <a:cs typeface="Calibri" pitchFamily="34" charset="-120"/>
-              </a:rPr>
-              <a:t>Bu çalışmada klasik SMOTE kullanıldı. ADASYN veya karar sınırlarına odaklanan BorderlineSMOTE gibi alternatiflerin karşılaştırmalı testi, azınlık sınıfı tespitinde ek kazanımlar sağlayabilir.</a:t>
-            </a:r>
-            <a:endParaRPr lang="en-US" sz="1050" dirty="0"/>
-          </a:p>
-        </p:txBody>
-      </p:sp>
-      <p:sp>
-        <p:nvSpPr>
-          <p:cNvPr id="10" name="Shape 8"/>
-          <p:cNvSpPr/>
-          <p:nvPr/>
-        </p:nvSpPr>
-        <p:spPr>
-          <a:xfrm>
-            <a:off x="228600" y="1883664"/>
-            <a:ext cx="8686800" cy="713232"/>
-          </a:xfrm>
-          <a:prstGeom prst="rect">
-            <a:avLst/>
-          </a:prstGeom>
-          <a:solidFill>
-            <a:srgbClr val="111E35"/>
-          </a:solidFill>
-          <a:ln w="12700">
-            <a:solidFill>
-              <a:srgbClr val="111E35"/>
-            </a:solidFill>
-            <a:prstDash val="solid"/>
-          </a:ln>
-          <a:effectLst>
-            <a:outerShdw blurRad="101600" dist="38100" dir="8100000" algn="bl" rotWithShape="0">
-              <a:srgbClr val="000000">
-                <a:alpha val="25000"/>
-              </a:srgbClr>
-            </a:outerShdw>
-          </a:effectLst>
-        </p:spPr>
-        <p:txBody>
-          <a:bodyPr/>
-          <a:lstStyle/>
-          <a:p>
-            <a:endParaRPr lang="tr-TR"/>
-          </a:p>
-        </p:txBody>
-      </p:sp>
-      <p:sp>
-        <p:nvSpPr>
-          <p:cNvPr id="11" name="Shape 9"/>
-          <p:cNvSpPr/>
-          <p:nvPr/>
-        </p:nvSpPr>
-        <p:spPr>
-          <a:xfrm>
-            <a:off x="228600" y="1883664"/>
-            <a:ext cx="45720" cy="713232"/>
-          </a:xfrm>
-          <a:prstGeom prst="rect">
-            <a:avLst/>
-          </a:prstGeom>
-          <a:solidFill>
-            <a:srgbClr val="00B4D8"/>
-          </a:solidFill>
-          <a:ln w="12700">
-            <a:solidFill>
-              <a:srgbClr val="00B4D8"/>
-            </a:solidFill>
-            <a:prstDash val="solid"/>
-          </a:ln>
-        </p:spPr>
-        <p:txBody>
-          <a:bodyPr/>
-          <a:lstStyle/>
-          <a:p>
-            <a:endParaRPr lang="tr-TR"/>
-          </a:p>
-        </p:txBody>
-      </p:sp>
-      <p:sp>
-        <p:nvSpPr>
-          <p:cNvPr id="12" name="Text 10"/>
-          <p:cNvSpPr/>
-          <p:nvPr/>
-        </p:nvSpPr>
-        <p:spPr>
-          <a:xfrm>
-            <a:off x="338328" y="1947672"/>
-            <a:ext cx="8522208" cy="274320"/>
-          </a:xfrm>
-          <a:prstGeom prst="rect">
-            <a:avLst/>
-          </a:prstGeom>
-          <a:noFill/>
-          <a:ln/>
-        </p:spPr>
-        <p:txBody>
-          <a:bodyPr wrap="square" lIns="0" tIns="0" rIns="0" bIns="0" rtlCol="0" anchor="ctr"/>
-          <a:lstStyle/>
-          <a:p>
-            <a:pPr marL="0" indent="0">
-              <a:buNone/>
-            </a:pPr>
-            <a:r>
-              <a:rPr lang="en-US" sz="1100" b="1" dirty="0">
-                <a:solidFill>
-                  <a:srgbClr val="00B4D8"/>
-                </a:solidFill>
-                <a:latin typeface="Calibri" pitchFamily="34" charset="0"/>
-                <a:ea typeface="Calibri" pitchFamily="34" charset="-122"/>
-                <a:cs typeface="Calibri" pitchFamily="34" charset="-120"/>
-              </a:rPr>
-              <a:t>Öneri 2: Gerçek Teleskop Verisi</a:t>
-            </a:r>
-            <a:endParaRPr lang="en-US" sz="1100" dirty="0"/>
-          </a:p>
-        </p:txBody>
-      </p:sp>
-      <p:sp>
-        <p:nvSpPr>
-          <p:cNvPr id="13" name="Text 11"/>
-          <p:cNvSpPr/>
-          <p:nvPr/>
-        </p:nvSpPr>
-        <p:spPr>
-          <a:xfrm>
-            <a:off x="338328" y="2231136"/>
-            <a:ext cx="8522208" cy="274320"/>
-          </a:xfrm>
-          <a:prstGeom prst="rect">
-            <a:avLst/>
-          </a:prstGeom>
-          <a:noFill/>
-          <a:ln/>
-        </p:spPr>
-        <p:txBody>
-          <a:bodyPr wrap="square" lIns="0" tIns="0" rIns="0" bIns="0" rtlCol="0" anchor="ctr"/>
-          <a:lstStyle/>
-          <a:p>
-            <a:pPr marL="0" indent="0">
-              <a:buNone/>
-            </a:pPr>
-            <a:r>
-              <a:rPr lang="en-US" sz="1050" dirty="0">
-                <a:solidFill>
-                  <a:srgbClr val="CBD5E1"/>
-                </a:solidFill>
-                <a:latin typeface="Calibri" pitchFamily="34" charset="0"/>
-                <a:ea typeface="Calibri" pitchFamily="34" charset="-122"/>
-                <a:cs typeface="Calibri" pitchFamily="34" charset="-120"/>
-              </a:rPr>
-              <a:t>Bu veri seti Monte Carlo simülasyonu. Aynı metodoloji ve Pipeline'ın gerçek MAGIC gözlem verileri üzerinde tekrarlanması modelin saha koşullarındaki güvenilirliğini netleştirecektir.</a:t>
-            </a:r>
-            <a:endParaRPr lang="en-US" sz="1050" dirty="0"/>
-          </a:p>
-        </p:txBody>
-      </p:sp>
-      <p:sp>
-        <p:nvSpPr>
-          <p:cNvPr id="14" name="Shape 12"/>
-          <p:cNvSpPr/>
-          <p:nvPr/>
-        </p:nvSpPr>
-        <p:spPr>
-          <a:xfrm>
-            <a:off x="228600" y="2688336"/>
-            <a:ext cx="8686800" cy="713232"/>
-          </a:xfrm>
-          <a:prstGeom prst="rect">
-            <a:avLst/>
-          </a:prstGeom>
-          <a:solidFill>
-            <a:srgbClr val="111E35"/>
-          </a:solidFill>
-          <a:ln w="12700">
-            <a:solidFill>
-              <a:srgbClr val="111E35"/>
-            </a:solidFill>
-            <a:prstDash val="solid"/>
-          </a:ln>
-          <a:effectLst>
-            <a:outerShdw blurRad="101600" dist="38100" dir="8100000" algn="bl" rotWithShape="0">
-              <a:srgbClr val="000000">
-                <a:alpha val="25000"/>
-              </a:srgbClr>
-            </a:outerShdw>
-          </a:effectLst>
-        </p:spPr>
-        <p:txBody>
-          <a:bodyPr/>
-          <a:lstStyle/>
-          <a:p>
-            <a:endParaRPr lang="tr-TR"/>
-          </a:p>
-        </p:txBody>
-      </p:sp>
-      <p:sp>
-        <p:nvSpPr>
-          <p:cNvPr id="15" name="Shape 13"/>
-          <p:cNvSpPr/>
-          <p:nvPr/>
-        </p:nvSpPr>
-        <p:spPr>
-          <a:xfrm>
-            <a:off x="228600" y="2688336"/>
-            <a:ext cx="45720" cy="713232"/>
-          </a:xfrm>
-          <a:prstGeom prst="rect">
-            <a:avLst/>
-          </a:prstGeom>
-          <a:solidFill>
-            <a:srgbClr val="7B2FBE"/>
-          </a:solidFill>
-          <a:ln w="12700">
-            <a:solidFill>
-              <a:srgbClr val="7B2FBE"/>
-            </a:solidFill>
-            <a:prstDash val="solid"/>
-          </a:ln>
-        </p:spPr>
-        <p:txBody>
-          <a:bodyPr/>
-          <a:lstStyle/>
-          <a:p>
-            <a:endParaRPr lang="tr-TR"/>
-          </a:p>
-        </p:txBody>
-      </p:sp>
-      <p:sp>
-        <p:nvSpPr>
-          <p:cNvPr id="16" name="Text 14"/>
-          <p:cNvSpPr/>
-          <p:nvPr/>
-        </p:nvSpPr>
-        <p:spPr>
-          <a:xfrm>
-            <a:off x="338328" y="2752344"/>
-            <a:ext cx="8522208" cy="274320"/>
-          </a:xfrm>
-          <a:prstGeom prst="rect">
-            <a:avLst/>
-          </a:prstGeom>
-          <a:noFill/>
-          <a:ln/>
-        </p:spPr>
-        <p:txBody>
-          <a:bodyPr wrap="square" lIns="0" tIns="0" rIns="0" bIns="0" rtlCol="0" anchor="ctr"/>
-          <a:lstStyle/>
-          <a:p>
-            <a:pPr marL="0" indent="0">
-              <a:buNone/>
-            </a:pPr>
-            <a:r>
-              <a:rPr lang="en-US" sz="1100" b="1" dirty="0">
-                <a:solidFill>
-                  <a:srgbClr val="7B2FBE"/>
-                </a:solidFill>
-                <a:latin typeface="Calibri" pitchFamily="34" charset="0"/>
-                <a:ea typeface="Calibri" pitchFamily="34" charset="-122"/>
-                <a:cs typeface="Calibri" pitchFamily="34" charset="-120"/>
-              </a:rPr>
-              <a:t>Öneri 3: XGBoost &amp; LightGBM</a:t>
-            </a:r>
-            <a:endParaRPr lang="en-US" sz="1100" dirty="0"/>
-          </a:p>
-        </p:txBody>
-      </p:sp>
-      <p:sp>
-        <p:nvSpPr>
-          <p:cNvPr id="17" name="Text 15"/>
-          <p:cNvSpPr/>
-          <p:nvPr/>
-        </p:nvSpPr>
-        <p:spPr>
-          <a:xfrm>
-            <a:off x="338328" y="3035808"/>
-            <a:ext cx="8522208" cy="274320"/>
-          </a:xfrm>
-          <a:prstGeom prst="rect">
-            <a:avLst/>
-          </a:prstGeom>
-          <a:noFill/>
-          <a:ln/>
-        </p:spPr>
-        <p:txBody>
-          <a:bodyPr wrap="square" lIns="0" tIns="0" rIns="0" bIns="0" rtlCol="0" anchor="ctr"/>
-          <a:lstStyle/>
-          <a:p>
-            <a:pPr marL="0" indent="0">
-              <a:buNone/>
-            </a:pPr>
-            <a:r>
-              <a:rPr lang="en-US" sz="1050" dirty="0">
-                <a:solidFill>
-                  <a:srgbClr val="CBD5E1"/>
-                </a:solidFill>
-                <a:latin typeface="Calibri" pitchFamily="34" charset="0"/>
-                <a:ea typeface="Calibri" pitchFamily="34" charset="-122"/>
-                <a:cs typeface="Calibri" pitchFamily="34" charset="-120"/>
-              </a:rPr>
-              <a:t>Gradyan artırma tabanlı algoritmalar kapsam dışında tutuldu. XGBoost aynı veri setinde %88,4 bildiriyor. SMOTE Pipeline'a entegre edilerek mevcut liderle yarıştırılması değerlidir.</a:t>
-            </a:r>
-            <a:endParaRPr lang="en-US" sz="1050" dirty="0"/>
-          </a:p>
-        </p:txBody>
-      </p:sp>
-      <p:sp>
-        <p:nvSpPr>
-          <p:cNvPr id="18" name="Shape 16"/>
-          <p:cNvSpPr/>
-          <p:nvPr/>
-        </p:nvSpPr>
-        <p:spPr>
-          <a:xfrm>
-            <a:off x="228600" y="3493008"/>
-            <a:ext cx="8686800" cy="713232"/>
-          </a:xfrm>
-          <a:prstGeom prst="rect">
-            <a:avLst/>
-          </a:prstGeom>
-          <a:solidFill>
-            <a:srgbClr val="111E35"/>
-          </a:solidFill>
-          <a:ln w="12700">
-            <a:solidFill>
-              <a:srgbClr val="111E35"/>
-            </a:solidFill>
-            <a:prstDash val="solid"/>
-          </a:ln>
-          <a:effectLst>
-            <a:outerShdw blurRad="101600" dist="38100" dir="8100000" algn="bl" rotWithShape="0">
-              <a:srgbClr val="000000">
-                <a:alpha val="25000"/>
-              </a:srgbClr>
-            </a:outerShdw>
-          </a:effectLst>
-        </p:spPr>
-        <p:txBody>
-          <a:bodyPr/>
-          <a:lstStyle/>
-          <a:p>
-            <a:endParaRPr lang="tr-TR"/>
-          </a:p>
-        </p:txBody>
-      </p:sp>
-      <p:sp>
-        <p:nvSpPr>
-          <p:cNvPr id="19" name="Shape 17"/>
-          <p:cNvSpPr/>
-          <p:nvPr/>
-        </p:nvSpPr>
-        <p:spPr>
-          <a:xfrm>
-            <a:off x="228600" y="3493008"/>
-            <a:ext cx="45720" cy="713232"/>
-          </a:xfrm>
-          <a:prstGeom prst="rect">
-            <a:avLst/>
-          </a:prstGeom>
-          <a:solidFill>
-            <a:srgbClr val="7B2FBE"/>
-          </a:solidFill>
-          <a:ln w="12700">
-            <a:solidFill>
-              <a:srgbClr val="7B2FBE"/>
-            </a:solidFill>
-            <a:prstDash val="solid"/>
-          </a:ln>
-        </p:spPr>
-        <p:txBody>
-          <a:bodyPr/>
-          <a:lstStyle/>
-          <a:p>
-            <a:endParaRPr lang="tr-TR"/>
-          </a:p>
-        </p:txBody>
-      </p:sp>
-      <p:sp>
-        <p:nvSpPr>
-          <p:cNvPr id="20" name="Text 18"/>
-          <p:cNvSpPr/>
-          <p:nvPr/>
-        </p:nvSpPr>
-        <p:spPr>
-          <a:xfrm>
-            <a:off x="338328" y="3557016"/>
-            <a:ext cx="8522208" cy="274320"/>
-          </a:xfrm>
-          <a:prstGeom prst="rect">
-            <a:avLst/>
-          </a:prstGeom>
-          <a:noFill/>
-          <a:ln/>
-        </p:spPr>
-        <p:txBody>
-          <a:bodyPr wrap="square" lIns="0" tIns="0" rIns="0" bIns="0" rtlCol="0" anchor="ctr"/>
-          <a:lstStyle/>
-          <a:p>
-            <a:pPr marL="0" indent="0">
-              <a:buNone/>
-            </a:pPr>
-            <a:r>
-              <a:rPr lang="en-US" sz="1100" b="1" dirty="0">
-                <a:solidFill>
-                  <a:srgbClr val="7B2FBE"/>
-                </a:solidFill>
-                <a:latin typeface="Calibri" pitchFamily="34" charset="0"/>
-                <a:ea typeface="Calibri" pitchFamily="34" charset="-122"/>
-                <a:cs typeface="Calibri" pitchFamily="34" charset="-120"/>
-              </a:rPr>
-              <a:t>Öneri 4: LIME ile SHAP Karşılaştırması</a:t>
-            </a:r>
-            <a:endParaRPr lang="en-US" sz="1100" dirty="0"/>
-          </a:p>
-        </p:txBody>
-      </p:sp>
-      <p:sp>
-        <p:nvSpPr>
-          <p:cNvPr id="21" name="Text 19"/>
-          <p:cNvSpPr/>
-          <p:nvPr/>
-        </p:nvSpPr>
-        <p:spPr>
-          <a:xfrm>
-            <a:off x="338328" y="3840480"/>
-            <a:ext cx="8522208" cy="274320"/>
-          </a:xfrm>
-          <a:prstGeom prst="rect">
-            <a:avLst/>
-          </a:prstGeom>
-          <a:noFill/>
-          <a:ln/>
-        </p:spPr>
-        <p:txBody>
-          <a:bodyPr wrap="square" lIns="0" tIns="0" rIns="0" bIns="0" rtlCol="0" anchor="ctr"/>
-          <a:lstStyle/>
-          <a:p>
-            <a:pPr marL="0" indent="0">
-              <a:buNone/>
-            </a:pPr>
-            <a:r>
-              <a:rPr lang="en-US" sz="1050" dirty="0">
-                <a:solidFill>
-                  <a:srgbClr val="CBD5E1"/>
-                </a:solidFill>
-                <a:latin typeface="Calibri" pitchFamily="34" charset="0"/>
-                <a:ea typeface="Calibri" pitchFamily="34" charset="-122"/>
-                <a:cs typeface="Calibri" pitchFamily="34" charset="-120"/>
-              </a:rPr>
-              <a:t>Açıklanabilirlik bu çalışmada SHAP ile sağlandı. LIME gibi farklı yerel XAI yöntemlerinin aynı model üzerinde kıyaslanması daha zengin bir perspektif sunacaktır.</a:t>
-            </a:r>
-            <a:endParaRPr lang="en-US" sz="1050" dirty="0"/>
-          </a:p>
-        </p:txBody>
-      </p:sp>
-      <p:sp>
-        <p:nvSpPr>
-          <p:cNvPr id="22" name="Shape 20"/>
-          <p:cNvSpPr/>
-          <p:nvPr/>
-        </p:nvSpPr>
-        <p:spPr>
-          <a:xfrm>
-            <a:off x="228600" y="4297680"/>
-            <a:ext cx="8686800" cy="713232"/>
-          </a:xfrm>
-          <a:prstGeom prst="rect">
-            <a:avLst/>
-          </a:prstGeom>
-          <a:solidFill>
-            <a:srgbClr val="111E35"/>
-          </a:solidFill>
-          <a:ln w="12700">
-            <a:solidFill>
-              <a:srgbClr val="111E35"/>
-            </a:solidFill>
-            <a:prstDash val="solid"/>
-          </a:ln>
-          <a:effectLst>
-            <a:outerShdw blurRad="101600" dist="38100" dir="8100000" algn="bl" rotWithShape="0">
-              <a:srgbClr val="000000">
-                <a:alpha val="25000"/>
-              </a:srgbClr>
-            </a:outerShdw>
-          </a:effectLst>
-        </p:spPr>
-        <p:txBody>
-          <a:bodyPr/>
-          <a:lstStyle/>
-          <a:p>
-            <a:endParaRPr lang="tr-TR"/>
-          </a:p>
-        </p:txBody>
-      </p:sp>
-      <p:sp>
-        <p:nvSpPr>
-          <p:cNvPr id="23" name="Shape 21"/>
-          <p:cNvSpPr/>
-          <p:nvPr/>
-        </p:nvSpPr>
-        <p:spPr>
-          <a:xfrm>
-            <a:off x="228600" y="4297680"/>
-            <a:ext cx="45720" cy="713232"/>
-          </a:xfrm>
-          <a:prstGeom prst="rect">
-            <a:avLst/>
-          </a:prstGeom>
-          <a:solidFill>
-            <a:srgbClr val="F4A261"/>
-          </a:solidFill>
-          <a:ln w="12700">
-            <a:solidFill>
-              <a:srgbClr val="F4A261"/>
-            </a:solidFill>
-            <a:prstDash val="solid"/>
-          </a:ln>
-        </p:spPr>
-        <p:txBody>
-          <a:bodyPr/>
-          <a:lstStyle/>
-          <a:p>
-            <a:endParaRPr lang="tr-TR"/>
-          </a:p>
-        </p:txBody>
-      </p:sp>
-      <p:sp>
-        <p:nvSpPr>
-          <p:cNvPr id="24" name="Text 22"/>
-          <p:cNvSpPr/>
-          <p:nvPr/>
-        </p:nvSpPr>
-        <p:spPr>
-          <a:xfrm>
-            <a:off x="338328" y="4361688"/>
-            <a:ext cx="8522208" cy="274320"/>
-          </a:xfrm>
-          <a:prstGeom prst="rect">
-            <a:avLst/>
-          </a:prstGeom>
-          <a:noFill/>
-          <a:ln/>
-        </p:spPr>
-        <p:txBody>
-          <a:bodyPr wrap="square" lIns="0" tIns="0" rIns="0" bIns="0" rtlCol="0" anchor="ctr"/>
-          <a:lstStyle/>
-          <a:p>
-            <a:pPr marL="0" indent="0">
-              <a:buNone/>
-            </a:pPr>
-            <a:r>
-              <a:rPr lang="en-US" sz="1100" b="1" dirty="0">
-                <a:solidFill>
-                  <a:srgbClr val="F4A261"/>
-                </a:solidFill>
-                <a:latin typeface="Calibri" pitchFamily="34" charset="0"/>
-                <a:ea typeface="Calibri" pitchFamily="34" charset="-122"/>
-                <a:cs typeface="Calibri" pitchFamily="34" charset="-120"/>
-              </a:rPr>
-              <a:t>Öneri 5: CTLearn — Ham Görüntü Tabanlı DL</a:t>
-            </a:r>
-            <a:endParaRPr lang="en-US" sz="1100" dirty="0"/>
-          </a:p>
-        </p:txBody>
-      </p:sp>
-      <p:sp>
-        <p:nvSpPr>
-          <p:cNvPr id="25" name="Text 23"/>
-          <p:cNvSpPr/>
-          <p:nvPr/>
-        </p:nvSpPr>
-        <p:spPr>
-          <a:xfrm>
-            <a:off x="338328" y="4645152"/>
-            <a:ext cx="8522208" cy="274320"/>
-          </a:xfrm>
-          <a:prstGeom prst="rect">
-            <a:avLst/>
-          </a:prstGeom>
-          <a:noFill/>
-          <a:ln/>
-        </p:spPr>
-        <p:txBody>
-          <a:bodyPr wrap="square" lIns="0" tIns="0" rIns="0" bIns="0" rtlCol="0" anchor="ctr"/>
-          <a:lstStyle/>
-          <a:p>
-            <a:pPr marL="0" indent="0">
-              <a:buNone/>
-            </a:pPr>
-            <a:r>
-              <a:rPr lang="en-US" sz="1050" dirty="0">
-                <a:solidFill>
-                  <a:srgbClr val="CBD5E1"/>
-                </a:solidFill>
-                <a:latin typeface="Calibri" pitchFamily="34" charset="0"/>
-                <a:ea typeface="Calibri" pitchFamily="34" charset="-122"/>
-                <a:cs typeface="Calibri" pitchFamily="34" charset="-120"/>
-              </a:rPr>
-              <a:t>CTLearn gibi altyapıların ham kamera görüntülerini işlemesiyle, Hillas parametrelerine dayanan yaklaşımın kıyaslanması hangi yöntemin daha fazla bilimsel bilgi sağladığını netleştirebilir.</a:t>
-            </a:r>
-            <a:endParaRPr lang="en-US" sz="1050" dirty="0"/>
+        </p:spPr>
+        <p:txBody>
+          <a:bodyPr wrap="square" rtlCol="0">
+            <a:spAutoFit/>
+          </a:bodyPr>
+          <a:lstStyle/>
+          <a:p>
+            <a:r>
+              <a:rPr lang="tr-TR" sz="1200" b="1" dirty="0">
+                <a:solidFill>
+                  <a:schemeClr val="bg2">
+                    <a:lumMod val="90000"/>
+                  </a:schemeClr>
+                </a:solidFill>
+              </a:rPr>
+              <a:t>                                                MAGIC Gamma </a:t>
+            </a:r>
+            <a:r>
+              <a:rPr lang="tr-TR" sz="1200" b="1" dirty="0" err="1">
+                <a:solidFill>
+                  <a:schemeClr val="bg2">
+                    <a:lumMod val="90000"/>
+                  </a:schemeClr>
+                </a:solidFill>
+              </a:rPr>
+              <a:t>Telescope</a:t>
+            </a:r>
+            <a:r>
+              <a:rPr lang="tr-TR" sz="1200" b="1" dirty="0">
+                <a:solidFill>
+                  <a:schemeClr val="bg2">
+                    <a:lumMod val="90000"/>
+                  </a:schemeClr>
+                </a:solidFill>
+              </a:rPr>
+              <a:t>: Makine Öğrenmesi ile Sınıflandırma Analizi</a:t>
+            </a:r>
+          </a:p>
+          <a:p>
+            <a:endParaRPr lang="tr-TR" sz="1200" b="1" dirty="0">
+              <a:solidFill>
+                <a:schemeClr val="bg2">
+                  <a:lumMod val="90000"/>
+                </a:schemeClr>
+              </a:solidFill>
+            </a:endParaRPr>
+          </a:p>
+          <a:p>
+            <a:endParaRPr lang="tr-TR" sz="1200" b="1" dirty="0">
+              <a:solidFill>
+                <a:schemeClr val="bg2">
+                  <a:lumMod val="90000"/>
+                </a:schemeClr>
+              </a:solidFill>
+            </a:endParaRPr>
+          </a:p>
+          <a:p>
+            <a:r>
+              <a:rPr lang="tr-TR" sz="1200" b="1" dirty="0">
+                <a:solidFill>
+                  <a:schemeClr val="bg2">
+                    <a:lumMod val="90000"/>
+                  </a:schemeClr>
+                </a:solidFill>
+              </a:rPr>
+              <a:t>TEŞEKKÜRLER</a:t>
+            </a:r>
+          </a:p>
+          <a:p>
+            <a:endParaRPr lang="tr-TR" sz="1200" dirty="0">
+              <a:solidFill>
+                <a:schemeClr val="bg2">
+                  <a:lumMod val="90000"/>
+                </a:schemeClr>
+              </a:solidFill>
+            </a:endParaRPr>
+          </a:p>
+          <a:p>
+            <a:r>
+              <a:rPr lang="tr-TR" sz="1200" b="1" dirty="0">
+                <a:solidFill>
+                  <a:schemeClr val="bg2">
+                    <a:lumMod val="90000"/>
+                  </a:schemeClr>
+                </a:solidFill>
+              </a:rPr>
+              <a:t>Hazırlayanlar</a:t>
+            </a:r>
+          </a:p>
+          <a:p>
+            <a:endParaRPr lang="tr-TR" sz="1200" b="1" dirty="0">
+              <a:solidFill>
+                <a:schemeClr val="bg2">
+                  <a:lumMod val="90000"/>
+                </a:schemeClr>
+              </a:solidFill>
+            </a:endParaRPr>
+          </a:p>
+          <a:p>
+            <a:r>
+              <a:rPr lang="tr-TR" sz="1200" b="1" dirty="0">
+                <a:solidFill>
+                  <a:schemeClr val="bg2">
+                    <a:lumMod val="90000"/>
+                  </a:schemeClr>
+                </a:solidFill>
+              </a:rPr>
+              <a:t>24181616037-SUDE AKSU</a:t>
+            </a:r>
+          </a:p>
+          <a:p>
+            <a:r>
+              <a:rPr lang="tr-TR" sz="1200" b="1" dirty="0">
+                <a:solidFill>
+                  <a:schemeClr val="bg2">
+                    <a:lumMod val="90000"/>
+                  </a:schemeClr>
+                </a:solidFill>
+              </a:rPr>
+              <a:t>241816161038-ELİF KINALI</a:t>
+            </a:r>
+          </a:p>
+          <a:p>
+            <a:endParaRPr lang="tr-TR" sz="1200" b="1" dirty="0">
+              <a:solidFill>
+                <a:schemeClr val="bg2">
+                  <a:lumMod val="90000"/>
+                </a:schemeClr>
+              </a:solidFill>
+            </a:endParaRPr>
+          </a:p>
+          <a:p>
+            <a:r>
+              <a:rPr lang="tr-TR" sz="1200" dirty="0">
+                <a:solidFill>
+                  <a:schemeClr val="bg2">
+                    <a:lumMod val="90000"/>
+                  </a:schemeClr>
+                </a:solidFill>
+              </a:rPr>
+              <a:t>Gazi Üniversitesi Teknoloji Fakültesi  Bilgisayar Mühendisliği </a:t>
+            </a:r>
+          </a:p>
+          <a:p>
+            <a:endParaRPr lang="tr-TR" sz="1200" dirty="0">
+              <a:solidFill>
+                <a:schemeClr val="bg2">
+                  <a:lumMod val="90000"/>
+                </a:schemeClr>
+              </a:solidFill>
+            </a:endParaRPr>
+          </a:p>
+          <a:p>
+            <a:r>
+              <a:rPr lang="tr-TR" sz="1200" b="1" dirty="0">
+                <a:solidFill>
+                  <a:schemeClr val="bg2">
+                    <a:lumMod val="90000"/>
+                  </a:schemeClr>
+                </a:solidFill>
+              </a:rPr>
+              <a:t>Dijital Portfolyo &amp; Kaynak Kodlar</a:t>
+            </a:r>
+          </a:p>
+          <a:p>
+            <a:r>
+              <a:rPr lang="tr-TR" sz="1200" b="1" dirty="0">
+                <a:solidFill>
+                  <a:schemeClr val="bg2">
+                    <a:lumMod val="90000"/>
+                  </a:schemeClr>
+                </a:solidFill>
+              </a:rPr>
+              <a:t>COLAB: https://colab.research.google.com/drive/1HpVjBDCu_91ZlriskFHyzBB5s9V6a8gD</a:t>
+            </a:r>
+          </a:p>
+          <a:p>
+            <a:r>
+              <a:rPr lang="tr-TR" sz="1200" b="1" dirty="0" err="1">
+                <a:solidFill>
+                  <a:schemeClr val="bg2">
+                    <a:lumMod val="90000"/>
+                  </a:schemeClr>
+                </a:solidFill>
+              </a:rPr>
+              <a:t>GitHub</a:t>
+            </a:r>
+            <a:r>
+              <a:rPr lang="tr-TR" sz="1200" b="1" dirty="0">
+                <a:solidFill>
+                  <a:schemeClr val="bg2">
+                    <a:lumMod val="90000"/>
+                  </a:schemeClr>
+                </a:solidFill>
+              </a:rPr>
+              <a:t>: https://github.com/sudeaksu/MAGIC-Gamma-Telescope-Classification</a:t>
+            </a:r>
+            <a:endParaRPr lang="tr-TR" sz="1200" dirty="0">
+              <a:solidFill>
+                <a:schemeClr val="bg2">
+                  <a:lumMod val="90000"/>
+                </a:schemeClr>
+              </a:solidFill>
+            </a:endParaRPr>
           </a:p>
         </p:txBody>
       </p:sp>
@@ -37852,373 +37064,6 @@
               </a:rPr>
               <a:t>Bu karmaşık fiziksel problemi çözmek ve gerçek gama olaylarını gürültüden yüksek hassasiyetle ayırabilmek amacıyla, optimize edilmiş makine öğrenmesi ve derin öğrenme modellerine kesin bir ihtiyaç duyulmaktadır. </a:t>
             </a:r>
-          </a:p>
-        </p:txBody>
-      </p:sp>
-    </p:spTree>
-  </p:cSld>
-  <p:clrMapOvr>
-    <a:masterClrMapping/>
-  </p:clrMapOvr>
-</p:sld>
-</file>
-
-<file path=ppt/slides/slide30.xml><?xml version="1.0" encoding="utf-8"?>
-<p:sld xmlns:a="http://schemas.openxmlformats.org/drawingml/2006/main" xmlns:r="http://schemas.openxmlformats.org/officeDocument/2006/relationships" xmlns:p="http://schemas.openxmlformats.org/presentationml/2006/main">
-  <p:cSld>
-    <p:spTree>
-      <p:nvGrpSpPr>
-        <p:cNvPr id="1" name=""/>
-        <p:cNvGrpSpPr/>
-        <p:nvPr/>
-      </p:nvGrpSpPr>
-      <p:grpSpPr>
-        <a:xfrm>
-          <a:off x="0" y="0"/>
-          <a:ext cx="0" cy="0"/>
-          <a:chOff x="0" y="0"/>
-          <a:chExt cx="0" cy="0"/>
-        </a:xfrm>
-      </p:grpSpPr>
-      <p:sp>
-        <p:nvSpPr>
-          <p:cNvPr id="2" name="Shape 0"/>
-          <p:cNvSpPr/>
-          <p:nvPr/>
-        </p:nvSpPr>
-        <p:spPr>
-          <a:xfrm>
-            <a:off x="0" y="0"/>
-            <a:ext cx="9144000" cy="5232400"/>
-          </a:xfrm>
-          <a:prstGeom prst="rect">
-            <a:avLst/>
-          </a:prstGeom>
-          <a:solidFill>
-            <a:srgbClr val="111E35"/>
-          </a:solidFill>
-          <a:ln w="12700">
-            <a:solidFill>
-              <a:srgbClr val="111E35"/>
-            </a:solidFill>
-            <a:prstDash val="solid"/>
-          </a:ln>
-        </p:spPr>
-        <p:txBody>
-          <a:bodyPr/>
-          <a:lstStyle/>
-          <a:p>
-            <a:endParaRPr lang="tr-TR" dirty="0"/>
-          </a:p>
-        </p:txBody>
-      </p:sp>
-      <p:sp>
-        <p:nvSpPr>
-          <p:cNvPr id="3" name="Text 1"/>
-          <p:cNvSpPr/>
-          <p:nvPr/>
-        </p:nvSpPr>
-        <p:spPr>
-          <a:xfrm>
-            <a:off x="365760" y="73152"/>
-            <a:ext cx="8412480" cy="502920"/>
-          </a:xfrm>
-          <a:prstGeom prst="rect">
-            <a:avLst/>
-          </a:prstGeom>
-          <a:noFill/>
-          <a:ln/>
-        </p:spPr>
-        <p:txBody>
-          <a:bodyPr wrap="square" lIns="0" tIns="0" rIns="0" bIns="0" rtlCol="0" anchor="ctr"/>
-          <a:lstStyle/>
-          <a:p>
-            <a:pPr marL="0" indent="0">
-              <a:buNone/>
-            </a:pPr>
-            <a:r>
-              <a:rPr lang="en-US" sz="2200" b="1" dirty="0">
-                <a:solidFill>
-                  <a:srgbClr val="FFFFFF"/>
-                </a:solidFill>
-                <a:latin typeface="Calibri" pitchFamily="34" charset="0"/>
-                <a:ea typeface="Calibri" pitchFamily="34" charset="-122"/>
-                <a:cs typeface="Calibri" pitchFamily="34" charset="-120"/>
-              </a:rPr>
-              <a:t>Ka</a:t>
-            </a:r>
-            <a:r>
-              <a:rPr lang="tr-TR" sz="2200" b="1" dirty="0" err="1">
-                <a:solidFill>
-                  <a:srgbClr val="FFFFFF"/>
-                </a:solidFill>
-                <a:latin typeface="Calibri" pitchFamily="34" charset="0"/>
-                <a:ea typeface="Calibri" pitchFamily="34" charset="-122"/>
-                <a:cs typeface="Calibri" pitchFamily="34" charset="-120"/>
-              </a:rPr>
-              <a:t>panış</a:t>
-            </a:r>
-            <a:endParaRPr lang="en-US" sz="2200" dirty="0"/>
-          </a:p>
-        </p:txBody>
-      </p:sp>
-      <p:sp>
-        <p:nvSpPr>
-          <p:cNvPr id="5" name="Shape 3"/>
-          <p:cNvSpPr/>
-          <p:nvPr/>
-        </p:nvSpPr>
-        <p:spPr>
-          <a:xfrm>
-            <a:off x="0" y="960120"/>
-            <a:ext cx="9144000" cy="36576"/>
-          </a:xfrm>
-          <a:prstGeom prst="rect">
-            <a:avLst/>
-          </a:prstGeom>
-          <a:solidFill>
-            <a:srgbClr val="00B4D8"/>
-          </a:solidFill>
-          <a:ln w="12700">
-            <a:solidFill>
-              <a:srgbClr val="00B4D8"/>
-            </a:solidFill>
-            <a:prstDash val="solid"/>
-          </a:ln>
-        </p:spPr>
-        <p:txBody>
-          <a:bodyPr/>
-          <a:lstStyle/>
-          <a:p>
-            <a:endParaRPr lang="tr-TR"/>
-          </a:p>
-        </p:txBody>
-      </p:sp>
-      <p:sp>
-        <p:nvSpPr>
-          <p:cNvPr id="6" name="Metin kutusu 5">
-            <a:extLst>
-              <a:ext uri="{FF2B5EF4-FFF2-40B4-BE49-F238E27FC236}">
-                <a16:creationId xmlns:a16="http://schemas.microsoft.com/office/drawing/2014/main" id="{CC74C18C-A522-2375-1D89-86048042E2D7}"/>
-              </a:ext>
-            </a:extLst>
-          </p:cNvPr>
-          <p:cNvSpPr txBox="1"/>
-          <p:nvPr/>
-        </p:nvSpPr>
-        <p:spPr>
-          <a:xfrm>
-            <a:off x="228600" y="1150570"/>
-            <a:ext cx="8055501" cy="2862322"/>
-          </a:xfrm>
-          <a:prstGeom prst="rect">
-            <a:avLst/>
-          </a:prstGeom>
-          <a:noFill/>
-        </p:spPr>
-        <p:txBody>
-          <a:bodyPr wrap="square" rtlCol="0">
-            <a:spAutoFit/>
-          </a:bodyPr>
-          <a:lstStyle/>
-          <a:p>
-            <a:r>
-              <a:rPr lang="tr-TR" sz="1200" b="1" dirty="0">
-                <a:solidFill>
-                  <a:schemeClr val="bg2">
-                    <a:lumMod val="90000"/>
-                  </a:schemeClr>
-                </a:solidFill>
-              </a:rPr>
-              <a:t>                                                MAGIC Gamma </a:t>
-            </a:r>
-            <a:r>
-              <a:rPr lang="tr-TR" sz="1200" b="1" dirty="0" err="1">
-                <a:solidFill>
-                  <a:schemeClr val="bg2">
-                    <a:lumMod val="90000"/>
-                  </a:schemeClr>
-                </a:solidFill>
-              </a:rPr>
-              <a:t>Telescope</a:t>
-            </a:r>
-            <a:r>
-              <a:rPr lang="tr-TR" sz="1200" b="1" dirty="0">
-                <a:solidFill>
-                  <a:schemeClr val="bg2">
-                    <a:lumMod val="90000"/>
-                  </a:schemeClr>
-                </a:solidFill>
-              </a:rPr>
-              <a:t>: Makine Öğrenmesi ile Sınıflandırma Analizi</a:t>
-            </a:r>
-          </a:p>
-          <a:p>
-            <a:endParaRPr lang="tr-TR" sz="1200" b="1" dirty="0">
-              <a:solidFill>
-                <a:schemeClr val="bg2">
-                  <a:lumMod val="90000"/>
-                </a:schemeClr>
-              </a:solidFill>
-            </a:endParaRPr>
-          </a:p>
-          <a:p>
-            <a:endParaRPr lang="tr-TR" sz="1200" b="1" dirty="0">
-              <a:solidFill>
-                <a:schemeClr val="bg2">
-                  <a:lumMod val="90000"/>
-                </a:schemeClr>
-              </a:solidFill>
-            </a:endParaRPr>
-          </a:p>
-          <a:p>
-            <a:r>
-              <a:rPr lang="tr-TR" sz="1200" b="1" dirty="0">
-                <a:solidFill>
-                  <a:schemeClr val="bg2">
-                    <a:lumMod val="90000"/>
-                  </a:schemeClr>
-                </a:solidFill>
-              </a:rPr>
-              <a:t>TEŞEKKÜRLER</a:t>
-            </a:r>
-          </a:p>
-          <a:p>
-            <a:endParaRPr lang="tr-TR" sz="1200" dirty="0">
-              <a:solidFill>
-                <a:schemeClr val="bg2">
-                  <a:lumMod val="90000"/>
-                </a:schemeClr>
-              </a:solidFill>
-            </a:endParaRPr>
-          </a:p>
-          <a:p>
-            <a:r>
-              <a:rPr lang="tr-TR" sz="1200" b="1" dirty="0">
-                <a:solidFill>
-                  <a:schemeClr val="bg2">
-                    <a:lumMod val="90000"/>
-                  </a:schemeClr>
-                </a:solidFill>
-              </a:rPr>
-              <a:t>Hazırlayanlar</a:t>
-            </a:r>
-          </a:p>
-          <a:p>
-            <a:endParaRPr lang="tr-TR" sz="1200" b="1" dirty="0">
-              <a:solidFill>
-                <a:schemeClr val="bg2">
-                  <a:lumMod val="90000"/>
-                </a:schemeClr>
-              </a:solidFill>
-            </a:endParaRPr>
-          </a:p>
-          <a:p>
-            <a:r>
-              <a:rPr lang="tr-TR" sz="1200" b="1" dirty="0">
-                <a:solidFill>
-                  <a:schemeClr val="bg2">
-                    <a:lumMod val="90000"/>
-                  </a:schemeClr>
-                </a:solidFill>
-              </a:rPr>
-              <a:t>24181616037-SUDE AKSU</a:t>
-            </a:r>
-          </a:p>
-          <a:p>
-            <a:r>
-              <a:rPr lang="tr-TR" sz="1200" b="1" dirty="0">
-                <a:solidFill>
-                  <a:schemeClr val="bg2">
-                    <a:lumMod val="90000"/>
-                  </a:schemeClr>
-                </a:solidFill>
-              </a:rPr>
-              <a:t>241816161038-ELİF KINALI</a:t>
-            </a:r>
-          </a:p>
-          <a:p>
-            <a:endParaRPr lang="tr-TR" sz="1200" b="1" dirty="0">
-              <a:solidFill>
-                <a:schemeClr val="bg2">
-                  <a:lumMod val="90000"/>
-                </a:schemeClr>
-              </a:solidFill>
-            </a:endParaRPr>
-          </a:p>
-          <a:p>
-            <a:r>
-              <a:rPr lang="tr-TR" sz="1200" dirty="0">
-                <a:solidFill>
-                  <a:schemeClr val="bg2">
-                    <a:lumMod val="90000"/>
-                  </a:schemeClr>
-                </a:solidFill>
-              </a:rPr>
-              <a:t>Gazi Üniversitesi Teknoloji Fakültesi  Bilgisayar Mühendisliği </a:t>
-            </a:r>
-          </a:p>
-          <a:p>
-            <a:endParaRPr lang="tr-TR" sz="1200" dirty="0">
-              <a:solidFill>
-                <a:schemeClr val="bg2">
-                  <a:lumMod val="90000"/>
-                </a:schemeClr>
-              </a:solidFill>
-            </a:endParaRPr>
-          </a:p>
-          <a:p>
-            <a:r>
-              <a:rPr lang="tr-TR" sz="1200" b="1" dirty="0">
-                <a:solidFill>
-                  <a:schemeClr val="bg2">
-                    <a:lumMod val="90000"/>
-                  </a:schemeClr>
-                </a:solidFill>
-              </a:rPr>
-              <a:t>Dijital Portfolyo &amp; Kaynak Kodlar</a:t>
-            </a:r>
-          </a:p>
-          <a:p>
-            <a:r>
-              <a:rPr lang="tr-TR" sz="1200" b="1" dirty="0">
-                <a:solidFill>
-                  <a:schemeClr val="bg2">
-                    <a:lumMod val="90000"/>
-                  </a:schemeClr>
-                </a:solidFill>
-              </a:rPr>
-              <a:t>COLAB: https://colab.research.google.com/drive/1HpVjBDCu_91ZlriskFHyzBB5s9V6a8gD</a:t>
-            </a:r>
-          </a:p>
-          <a:p>
-            <a:r>
-              <a:rPr lang="tr-TR" sz="1200" b="1" dirty="0" err="1">
-                <a:solidFill>
-                  <a:schemeClr val="bg2">
-                    <a:lumMod val="90000"/>
-                  </a:schemeClr>
-                </a:solidFill>
-              </a:rPr>
-              <a:t>GitHub</a:t>
-            </a:r>
-            <a:r>
-              <a:rPr lang="tr-TR" sz="1200" b="1" dirty="0">
-                <a:solidFill>
-                  <a:schemeClr val="bg2">
-                    <a:lumMod val="90000"/>
-                  </a:schemeClr>
-                </a:solidFill>
-              </a:rPr>
-              <a:t>: https://github.com/sudeaksu/MAGIC-Gamma-Telescope-Classification</a:t>
-            </a:r>
-            <a:endParaRPr lang="tr-TR" sz="1200" dirty="0">
-              <a:solidFill>
-                <a:schemeClr val="bg2">
-                  <a:lumMod val="90000"/>
-                </a:schemeClr>
-              </a:solidFill>
-            </a:endParaRPr>
           </a:p>
         </p:txBody>
       </p:sp>
